--- a/MLBasic/50 - Logistic_regression/Presentation/LogisticRegression.pptx
+++ b/MLBasic/50 - Logistic_regression/Presentation/LogisticRegression.pptx
@@ -246,7 +246,7 @@
           <a:p>
             <a:fld id="{22E49B28-5332-064F-B47E-7D035818BC1A}" type="datetimeFigureOut">
               <a:rPr lang="ru-RU" smtClean="0"/>
-              <a:t>13.05.2025</a:t>
+              <a:t>12.01.2026</a:t>
             </a:fld>
             <a:endParaRPr lang="ru-RU"/>
           </a:p>
@@ -24203,36 +24203,6 @@
           </a:p>
         </p:txBody>
       </p:sp>
-      <p:pic>
-        <p:nvPicPr>
-          <p:cNvPr id="4" name="Рисунок 3">
-            <a:extLst>
-              <a:ext uri="{FF2B5EF4-FFF2-40B4-BE49-F238E27FC236}">
-                <a16:creationId xmlns:a16="http://schemas.microsoft.com/office/drawing/2014/main" id="{9EB86344-C27F-9D46-A06F-9C3CE1D08EAB}"/>
-              </a:ext>
-            </a:extLst>
-          </p:cNvPr>
-          <p:cNvPicPr>
-            <a:picLocks noChangeAspect="1"/>
-          </p:cNvPicPr>
-          <p:nvPr/>
-        </p:nvPicPr>
-        <p:blipFill>
-          <a:blip r:embed="rId9"/>
-          <a:stretch>
-            <a:fillRect/>
-          </a:stretch>
-        </p:blipFill>
-        <p:spPr>
-          <a:xfrm>
-            <a:off x="7697894" y="3325906"/>
-            <a:ext cx="1446106" cy="1718982"/>
-          </a:xfrm>
-          <a:prstGeom prst="rect">
-            <a:avLst/>
-          </a:prstGeom>
-        </p:spPr>
-      </p:pic>
     </p:spTree>
   </p:cSld>
   <p:clrMapOvr>
@@ -24528,19 +24498,11 @@
             <a:pPr marL="1425575" indent="-1417638"/>
             <a:r>
               <a:rPr lang="ru-RU" sz="1150" b="1" dirty="0"/>
-              <a:t>Руководитель курсов</a:t>
-            </a:r>
-            <a:r>
-              <a:rPr lang="ru-RU" sz="1150" b="1"/>
-              <a:t>: </a:t>
-            </a:r>
-            <a:r>
-              <a:rPr lang="en-US" sz="1150" b="1"/>
-              <a:t>Reinforcement </a:t>
+              <a:t>Руководитель курсов: </a:t>
             </a:r>
             <a:r>
               <a:rPr lang="en-US" sz="1150" b="1" dirty="0"/>
-              <a:t>Learning</a:t>
+              <a:t>Reinforcement Learning</a:t>
             </a:r>
             <a:r>
               <a:rPr lang="ru-RU" sz="1150" b="1" dirty="0"/>
@@ -24688,7 +24650,7 @@
             </a:r>
             <a:r>
               <a:rPr lang="ru" sz="1150" dirty="0"/>
-              <a:t>олее 15 лет занимался прикладной математикой и мат моделированием</a:t>
+              <a:t>олее 20 лет занимался прикладной математикой и мат моделированием</a:t>
             </a:r>
           </a:p>
           <a:p>
